--- a/docs/presentation/pretrain_Jiaqi_0527_MoE.pptx
+++ b/docs/presentation/pretrain_Jiaqi_0527_MoE.pptx
@@ -39,6 +39,9 @@
     <p:sldId id="287" r:id="rId37"/>
     <p:sldId id="288" r:id="rId38"/>
     <p:sldId id="289" r:id="rId39"/>
+    <p:sldId id="290" r:id="rId40"/>
+    <p:sldId id="291" r:id="rId41"/>
+    <p:sldId id="292" r:id="rId42"/>
   </p:sldIdLst>
   <p:sldSz cx="12192000" cy="6858000"/>
   <p:notesSz cx="6858000" cy="9144000"/>
@@ -3476,7 +3479,7 @@
               </a:defRPr>
             </a:pPr>
             <a:r>
-              <a:t>01 / 34</a:t>
+              <a:t>01 / 37</a:t>
             </a:r>
           </a:p>
         </p:txBody>
@@ -4046,7 +4049,7 @@
               </a:defRPr>
             </a:pPr>
             <a:r>
-              <a:t>10 / 34</a:t>
+              <a:t>10 / 37</a:t>
             </a:r>
           </a:p>
         </p:txBody>
@@ -4686,7 +4689,7 @@
               </a:defRPr>
             </a:pPr>
             <a:r>
-              <a:t>11 / 34</a:t>
+              <a:t>11 / 37</a:t>
             </a:r>
           </a:p>
         </p:txBody>
@@ -5146,7 +5149,7 @@
               </a:defRPr>
             </a:pPr>
             <a:r>
-              <a:t>12 / 34</a:t>
+              <a:t>12 / 37</a:t>
             </a:r>
           </a:p>
         </p:txBody>
@@ -5899,7 +5902,7 @@
               </a:defRPr>
             </a:pPr>
             <a:r>
-              <a:t>13 / 34</a:t>
+              <a:t>13 / 37</a:t>
             </a:r>
           </a:p>
         </p:txBody>
@@ -6088,7 +6091,7 @@
               </a:defRPr>
             </a:pPr>
             <a:r>
-              <a:t>14 / 34</a:t>
+              <a:t>14 / 37</a:t>
             </a:r>
           </a:p>
         </p:txBody>
@@ -6959,7 +6962,7 @@
               </a:defRPr>
             </a:pPr>
             <a:r>
-              <a:t>15 / 34</a:t>
+              <a:t>15 / 37</a:t>
             </a:r>
           </a:p>
         </p:txBody>
@@ -7874,7 +7877,7 @@
               </a:defRPr>
             </a:pPr>
             <a:r>
-              <a:t>16 / 34</a:t>
+              <a:t>16 / 37</a:t>
             </a:r>
           </a:p>
         </p:txBody>
@@ -9059,7 +9062,7 @@
               </a:defRPr>
             </a:pPr>
             <a:r>
-              <a:t>17 / 34</a:t>
+              <a:t>17 / 37</a:t>
             </a:r>
           </a:p>
         </p:txBody>
@@ -9649,7 +9652,7 @@
               </a:defRPr>
             </a:pPr>
             <a:r>
-              <a:t>18 / 34</a:t>
+              <a:t>18 / 37</a:t>
             </a:r>
           </a:p>
         </p:txBody>
@@ -9824,7 +9827,7 @@
               </a:defRPr>
             </a:pPr>
             <a:r>
-              <a:t>19 / 34</a:t>
+              <a:t>19 / 37</a:t>
             </a:r>
           </a:p>
         </p:txBody>
@@ -10745,7 +10748,7 @@
               </a:defRPr>
             </a:pPr>
             <a:r>
-              <a:t>02 / 34</a:t>
+              <a:t>02 / 37</a:t>
             </a:r>
           </a:p>
         </p:txBody>
@@ -10934,7 +10937,7 @@
               </a:defRPr>
             </a:pPr>
             <a:r>
-              <a:t>20 / 34</a:t>
+              <a:t>20 / 37</a:t>
             </a:r>
           </a:p>
         </p:txBody>
@@ -11636,7 +11639,7 @@
               </a:defRPr>
             </a:pPr>
             <a:r>
-              <a:t>21 / 34</a:t>
+              <a:t>21 / 37</a:t>
             </a:r>
           </a:p>
         </p:txBody>
@@ -12802,7 +12805,7 @@
               </a:defRPr>
             </a:pPr>
             <a:r>
-              <a:t>22 / 34</a:t>
+              <a:t>22 / 37</a:t>
             </a:r>
           </a:p>
         </p:txBody>
@@ -13723,7 +13726,7 @@
               </a:defRPr>
             </a:pPr>
             <a:r>
-              <a:t>23 / 34</a:t>
+              <a:t>23 / 37</a:t>
             </a:r>
           </a:p>
         </p:txBody>
@@ -14702,7 +14705,7 @@
               </a:defRPr>
             </a:pPr>
             <a:r>
-              <a:t>24 / 34</a:t>
+              <a:t>24 / 37</a:t>
             </a:r>
           </a:p>
         </p:txBody>
@@ -15434,7 +15437,7 @@
               </a:defRPr>
             </a:pPr>
             <a:r>
-              <a:t>25 / 34</a:t>
+              <a:t>25 / 37</a:t>
             </a:r>
           </a:p>
         </p:txBody>
@@ -16423,7 +16426,7 @@
               </a:defRPr>
             </a:pPr>
             <a:r>
-              <a:t>26 / 34</a:t>
+              <a:t>26 / 37</a:t>
             </a:r>
           </a:p>
         </p:txBody>
@@ -16616,7 +16619,7 @@
               </a:defRPr>
             </a:pPr>
             <a:r>
-              <a:t>27 / 34</a:t>
+              <a:t>27 / 37</a:t>
             </a:r>
           </a:p>
         </p:txBody>
@@ -16790,7 +16793,7 @@
                 </a:solidFill>
                 <a:latin typeface="Consolas"/>
               </a:rPr>
-              <a:t>28 / 34</a:t>
+              <a:t>28 / 37</a:t>
             </a:r>
           </a:p>
         </p:txBody>
@@ -17964,7 +17967,7 @@
                 </a:solidFill>
                 <a:latin typeface="Consolas"/>
               </a:rPr>
-              <a:t>29 / 34</a:t>
+              <a:t>29 / 37</a:t>
             </a:r>
           </a:p>
         </p:txBody>
@@ -18851,7 +18854,7 @@
               </a:defRPr>
             </a:pPr>
             <a:r>
-              <a:t>03 / 34</a:t>
+              <a:t>03 / 37</a:t>
             </a:r>
           </a:p>
         </p:txBody>
@@ -19251,7 +19254,7 @@
                 </a:solidFill>
                 <a:latin typeface="Consolas"/>
               </a:rPr>
-              <a:t>30 / 34</a:t>
+              <a:t>30 / 37</a:t>
             </a:r>
           </a:p>
         </p:txBody>
@@ -19732,7 +19735,7 @@
                 </a:solidFill>
                 <a:latin typeface="Consolas"/>
               </a:rPr>
-              <a:t>31 / 34</a:t>
+              <a:t>31 / 37</a:t>
             </a:r>
           </a:p>
         </p:txBody>
@@ -20141,7 +20144,7 @@
                 </a:solidFill>
                 <a:latin typeface="Consolas"/>
               </a:rPr>
-              <a:t>32 / 34</a:t>
+              <a:t>32 / 37</a:t>
             </a:r>
           </a:p>
         </p:txBody>
@@ -20550,7 +20553,7 @@
                 </a:solidFill>
                 <a:latin typeface="Consolas"/>
               </a:rPr>
-              <a:t>33 / 34</a:t>
+              <a:t>33 / 37</a:t>
             </a:r>
           </a:p>
         </p:txBody>
@@ -21103,7 +21106,1486 @@
                 </a:solidFill>
                 <a:latin typeface="Consolas"/>
               </a:rPr>
-              <a:t>34 / 34</a:t>
+              <a:t>34 / 37</a:t>
+            </a:r>
+          </a:p>
+        </p:txBody>
+      </p:sp>
+    </p:spTree>
+  </p:cSld>
+  <p:clrMapOvr>
+    <a:masterClrMapping/>
+  </p:clrMapOvr>
+</p:sld>
+</file>
+
+<file path=ppt/slides/slide35.xml><?xml version="1.0" encoding="utf-8"?>
+<p:sld xmlns:a="http://schemas.openxmlformats.org/drawingml/2006/main" xmlns:p="http://schemas.openxmlformats.org/presentationml/2006/main" xmlns:r="http://schemas.openxmlformats.org/officeDocument/2006/relationships">
+  <p:cSld>
+    <p:bg>
+      <p:bgPr>
+        <a:solidFill>
+          <a:srgbClr val="F7F8FA"/>
+        </a:solidFill>
+        <a:effectLst/>
+      </p:bgPr>
+    </p:bg>
+    <p:spTree>
+      <p:nvGrpSpPr>
+        <p:cNvPr id="1" name=""/>
+        <p:cNvGrpSpPr/>
+        <p:nvPr/>
+      </p:nvGrpSpPr>
+      <p:grpSpPr/>
+      <p:sp>
+        <p:nvSpPr>
+          <p:cNvPr id="2" name="TextBox 1"/>
+          <p:cNvSpPr txBox="1"/>
+          <p:nvPr/>
+        </p:nvSpPr>
+        <p:spPr>
+          <a:xfrm>
+            <a:off x="731520" y="457200"/>
+            <a:ext cx="8412480" cy="731520"/>
+          </a:xfrm>
+          <a:prstGeom prst="rect">
+            <a:avLst/>
+          </a:prstGeom>
+          <a:noFill/>
+        </p:spPr>
+        <p:txBody>
+          <a:bodyPr wrap="square">
+            <a:spAutoFit/>
+          </a:bodyPr>
+          <a:lstStyle/>
+          <a:p>
+            <a:pPr algn="l">
+              <a:lnSpc>
+                <a:spcPts val="3800"/>
+              </a:lnSpc>
+            </a:pPr>
+            <a:r>
+              <a:rPr sz="3200" b="1">
+                <a:solidFill>
+                  <a:srgbClr val="1F2D3D"/>
+                </a:solidFill>
+                <a:latin typeface="Microsoft YaHei"/>
+              </a:rPr>
+              <a:t>Finding F: Same Ordering, Lévy-Shifted</a:t>
+            </a:r>
+          </a:p>
+        </p:txBody>
+      </p:sp>
+      <p:sp>
+        <p:nvSpPr>
+          <p:cNvPr id="3" name="TextBox 2"/>
+          <p:cNvSpPr txBox="1"/>
+          <p:nvPr/>
+        </p:nvSpPr>
+        <p:spPr>
+          <a:xfrm>
+            <a:off x="7863840" y="603504"/>
+            <a:ext cx="3840480" cy="457200"/>
+          </a:xfrm>
+          <a:prstGeom prst="rect">
+            <a:avLst/>
+          </a:prstGeom>
+          <a:noFill/>
+        </p:spPr>
+        <p:txBody>
+          <a:bodyPr wrap="square">
+            <a:spAutoFit/>
+          </a:bodyPr>
+          <a:lstStyle/>
+          <a:p>
+            <a:pPr algn="r"/>
+            <a:r>
+              <a:rPr sz="1600" b="0">
+                <a:solidFill>
+                  <a:srgbClr val="1A4F8B"/>
+                </a:solidFill>
+                <a:latin typeface="Microsoft YaHei"/>
+              </a:rPr>
+              <a:t>Per-Layer Breakdown</a:t>
+            </a:r>
+          </a:p>
+        </p:txBody>
+      </p:sp>
+      <p:pic>
+        <p:nvPicPr>
+          <p:cNvPr id="4" name="Picture 3" descr="dense_vs_moe_attn_ffn.png"/>
+          <p:cNvPicPr>
+            <a:picLocks noChangeAspect="1"/>
+          </p:cNvPicPr>
+          <p:nvPr/>
+        </p:nvPicPr>
+        <p:blipFill>
+          <a:blip r:embed="rId2"/>
+          <a:stretch>
+            <a:fillRect/>
+          </a:stretch>
+        </p:blipFill>
+        <p:spPr>
+          <a:xfrm>
+            <a:off x="457200" y="1371600"/>
+            <a:ext cx="6126480" cy="4251960"/>
+          </a:xfrm>
+          <a:prstGeom prst="rect">
+            <a:avLst/>
+          </a:prstGeom>
+        </p:spPr>
+      </p:pic>
+      <p:sp>
+        <p:nvSpPr>
+          <p:cNvPr id="5" name="Rounded Rectangle 4"/>
+          <p:cNvSpPr/>
+          <p:nvPr/>
+        </p:nvSpPr>
+        <p:spPr>
+          <a:xfrm>
+            <a:off x="6858000" y="1508760"/>
+            <a:ext cx="4572000" cy="731520"/>
+          </a:xfrm>
+          <a:prstGeom prst="roundRect">
+            <a:avLst>
+              <a:gd name="adj" fmla="val 8000"/>
+            </a:avLst>
+          </a:prstGeom>
+          <a:solidFill>
+            <a:srgbClr val="F2F4F7"/>
+          </a:solidFill>
+          <a:ln>
+            <a:noFill/>
+          </a:ln>
+          <a:effectLst/>
+        </p:spPr>
+        <p:style>
+          <a:lnRef idx="1">
+            <a:schemeClr val="accent1"/>
+          </a:lnRef>
+          <a:fillRef idx="3">
+            <a:schemeClr val="accent1"/>
+          </a:fillRef>
+          <a:effectRef idx="2">
+            <a:schemeClr val="accent1"/>
+          </a:effectRef>
+          <a:fontRef idx="minor">
+            <a:schemeClr val="lt1"/>
+          </a:fontRef>
+        </p:style>
+        <p:txBody>
+          <a:bodyPr rtlCol="0" anchor="ctr"/>
+          <a:lstStyle/>
+          <a:p>
+            <a:pPr algn="ctr"/>
+          </a:p>
+        </p:txBody>
+      </p:sp>
+      <p:sp>
+        <p:nvSpPr>
+          <p:cNvPr id="6" name="TextBox 5"/>
+          <p:cNvSpPr txBox="1"/>
+          <p:nvPr/>
+        </p:nvSpPr>
+        <p:spPr>
+          <a:xfrm>
+            <a:off x="6858000" y="1627632"/>
+            <a:ext cx="4572000" cy="457200"/>
+          </a:xfrm>
+          <a:prstGeom prst="rect">
+            <a:avLst/>
+          </a:prstGeom>
+          <a:noFill/>
+        </p:spPr>
+        <p:txBody>
+          <a:bodyPr wrap="square">
+            <a:spAutoFit/>
+          </a:bodyPr>
+          <a:lstStyle/>
+          <a:p>
+            <a:pPr algn="ctr"/>
+            <a:r>
+              <a:rPr sz="1500" b="1">
+                <a:solidFill>
+                  <a:srgbClr val="1F2D3D"/>
+                </a:solidFill>
+                <a:latin typeface="Consolas"/>
+              </a:rPr>
+              <a:t>FFN &gt; attn in BOTH;  gap Δα 1.26 → 0.41</a:t>
+            </a:r>
+          </a:p>
+        </p:txBody>
+      </p:sp>
+      <p:sp>
+        <p:nvSpPr>
+          <p:cNvPr id="7" name="TextBox 6"/>
+          <p:cNvSpPr txBox="1"/>
+          <p:nvPr/>
+        </p:nvSpPr>
+        <p:spPr>
+          <a:xfrm>
+            <a:off x="6858000" y="2514600"/>
+            <a:ext cx="4663440" cy="2194560"/>
+          </a:xfrm>
+          <a:prstGeom prst="rect">
+            <a:avLst/>
+          </a:prstGeom>
+          <a:noFill/>
+        </p:spPr>
+        <p:txBody>
+          <a:bodyPr wrap="square">
+            <a:spAutoFit/>
+          </a:bodyPr>
+          <a:lstStyle/>
+          <a:p>
+            <a:pPr algn="l" marL="285750" indent="-285750">
+              <a:lnSpc>
+                <a:spcPts val="2100"/>
+              </a:lnSpc>
+              <a:buFont typeface="Arial"/>
+              <a:buChar char="•"/>
+            </a:pPr>
+            <a:r>
+              <a:rPr sz="1300" b="0">
+                <a:solidFill>
+                  <a:srgbClr val="4A5A6B"/>
+                </a:solidFill>
+                <a:latin typeface="Microsoft YaHei"/>
+              </a:rPr>
+              <a:t>Ordering is preserved: </a:t>
+            </a:r>
+            <a:r>
+              <a:rPr sz="1300" b="1">
+                <a:solidFill>
+                  <a:srgbClr val="1F2D3D"/>
+                </a:solidFill>
+                <a:latin typeface="Microsoft YaHei"/>
+              </a:rPr>
+              <a:t>FFN α &gt; attn α</a:t>
+            </a:r>
+            <a:r>
+              <a:rPr sz="1300" b="0">
+                <a:solidFill>
+                  <a:srgbClr val="4A5A6B"/>
+                </a:solidFill>
+                <a:latin typeface="Microsoft YaHei"/>
+              </a:rPr>
+              <a:t> in both</a:t>
+            </a:r>
+          </a:p>
+          <a:p>
+            <a:pPr algn="l" marL="285750" indent="-285750">
+              <a:lnSpc>
+                <a:spcPts val="2100"/>
+              </a:lnSpc>
+              <a:buFont typeface="Arial"/>
+              <a:buChar char="•"/>
+            </a:pPr>
+            <a:r>
+              <a:rPr sz="1300" b="0">
+                <a:solidFill>
+                  <a:srgbClr val="4A5A6B"/>
+                </a:solidFill>
+                <a:latin typeface="Microsoft YaHei"/>
+              </a:rPr>
+              <a:t>(dense MLP 3.34 &gt; attn 2.08; MoE 1.62 &gt; 1.21)</a:t>
+            </a:r>
+          </a:p>
+          <a:p>
+            <a:pPr algn="l" marL="285750" indent="-285750">
+              <a:lnSpc>
+                <a:spcPts val="2100"/>
+              </a:lnSpc>
+              <a:buFont typeface="Arial"/>
+              <a:buChar char="•"/>
+            </a:pPr>
+            <a:r>
+              <a:rPr sz="1300" b="0">
+                <a:solidFill>
+                  <a:srgbClr val="4A5A6B"/>
+                </a:solidFill>
+                <a:latin typeface="Microsoft YaHei"/>
+              </a:rPr>
+              <a:t>But MoE pushes </a:t>
+            </a:r>
+            <a:r>
+              <a:rPr sz="1300" b="1">
+                <a:solidFill>
+                  <a:srgbClr val="2D6A4F"/>
+                </a:solidFill>
+                <a:latin typeface="Microsoft YaHei"/>
+              </a:rPr>
+              <a:t>every component below α=2</a:t>
+            </a:r>
+          </a:p>
+          <a:p>
+            <a:pPr algn="l" marL="285750" indent="-285750">
+              <a:lnSpc>
+                <a:spcPts val="2100"/>
+              </a:lnSpc>
+              <a:buFont typeface="Arial"/>
+              <a:buChar char="•"/>
+            </a:pPr>
+            <a:r>
+              <a:rPr sz="1300" b="0">
+                <a:solidFill>
+                  <a:srgbClr val="4A5A6B"/>
+                </a:solidFill>
+                <a:latin typeface="Microsoft YaHei"/>
+              </a:rPr>
+              <a:t>and shrinks the attn–FFN gap (1.26 → 0.41)</a:t>
+            </a:r>
+          </a:p>
+          <a:p>
+            <a:pPr algn="l" marL="285750" indent="-285750">
+              <a:lnSpc>
+                <a:spcPts val="2100"/>
+              </a:lnSpc>
+              <a:buFont typeface="Arial"/>
+              <a:buChar char="•"/>
+            </a:pPr>
+            <a:r>
+              <a:rPr sz="1300" b="0">
+                <a:solidFill>
+                  <a:srgbClr val="4A5A6B"/>
+                </a:solidFill>
+                <a:latin typeface="Microsoft YaHei"/>
+              </a:rPr>
+              <a:t>Within attn: q/k (α≈1.1) &lt; v/o (α≈1.27)</a:t>
+            </a:r>
+          </a:p>
+        </p:txBody>
+      </p:sp>
+      <p:sp>
+        <p:nvSpPr>
+          <p:cNvPr id="8" name="Rounded Rectangle 7"/>
+          <p:cNvSpPr/>
+          <p:nvPr/>
+        </p:nvSpPr>
+        <p:spPr>
+          <a:xfrm>
+            <a:off x="6858000" y="4709160"/>
+            <a:ext cx="4617720" cy="914400"/>
+          </a:xfrm>
+          <a:prstGeom prst="roundRect">
+            <a:avLst>
+              <a:gd name="adj" fmla="val 8000"/>
+            </a:avLst>
+          </a:prstGeom>
+          <a:solidFill>
+            <a:srgbClr val="E8EFF7"/>
+          </a:solidFill>
+          <a:ln>
+            <a:noFill/>
+          </a:ln>
+          <a:effectLst/>
+        </p:spPr>
+        <p:style>
+          <a:lnRef idx="1">
+            <a:schemeClr val="accent1"/>
+          </a:lnRef>
+          <a:fillRef idx="3">
+            <a:schemeClr val="accent1"/>
+          </a:fillRef>
+          <a:effectRef idx="2">
+            <a:schemeClr val="accent1"/>
+          </a:effectRef>
+          <a:fontRef idx="minor">
+            <a:schemeClr val="lt1"/>
+          </a:fontRef>
+        </p:style>
+        <p:txBody>
+          <a:bodyPr rtlCol="0" anchor="ctr"/>
+          <a:lstStyle/>
+          <a:p>
+            <a:pPr algn="ctr"/>
+          </a:p>
+        </p:txBody>
+      </p:sp>
+      <p:sp>
+        <p:nvSpPr>
+          <p:cNvPr id="9" name="TextBox 8"/>
+          <p:cNvSpPr txBox="1"/>
+          <p:nvPr/>
+        </p:nvSpPr>
+        <p:spPr>
+          <a:xfrm>
+            <a:off x="6995160" y="4846320"/>
+            <a:ext cx="4343400" cy="685800"/>
+          </a:xfrm>
+          <a:prstGeom prst="rect">
+            <a:avLst/>
+          </a:prstGeom>
+          <a:noFill/>
+        </p:spPr>
+        <p:txBody>
+          <a:bodyPr wrap="square" anchor="ctr">
+            <a:spAutoFit/>
+          </a:bodyPr>
+          <a:lstStyle/>
+          <a:p>
+            <a:pPr algn="l">
+              <a:lnSpc>
+                <a:spcPts val="1800"/>
+              </a:lnSpc>
+            </a:pPr>
+            <a:r>
+              <a:rPr sz="1300" b="0">
+                <a:solidFill>
+                  <a:srgbClr val="1F2D3D"/>
+                </a:solidFill>
+                <a:latin typeface="Microsoft YaHei"/>
+              </a:rPr>
+              <a:t>MoE doesn’t reverse the hierarchy — it </a:t>
+            </a:r>
+            <a:r>
+              <a:rPr sz="1300" b="1">
+                <a:solidFill>
+                  <a:srgbClr val="2D6A4F"/>
+                </a:solidFill>
+                <a:latin typeface="Microsoft YaHei"/>
+              </a:rPr>
+              <a:t>compresses</a:t>
+            </a:r>
+          </a:p>
+          <a:p>
+            <a:pPr algn="l">
+              <a:lnSpc>
+                <a:spcPts val="1800"/>
+              </a:lnSpc>
+            </a:pPr>
+            <a:r>
+              <a:rPr sz="1300" b="0">
+                <a:solidFill>
+                  <a:srgbClr val="1F2D3D"/>
+                </a:solidFill>
+                <a:latin typeface="Microsoft YaHei"/>
+              </a:rPr>
+              <a:t>everything into the heavy-tailed Lévy regime.</a:t>
+            </a:r>
+          </a:p>
+        </p:txBody>
+      </p:sp>
+      <p:sp>
+        <p:nvSpPr>
+          <p:cNvPr id="10" name="TextBox 9"/>
+          <p:cNvSpPr txBox="1"/>
+          <p:nvPr/>
+        </p:nvSpPr>
+        <p:spPr>
+          <a:xfrm>
+            <a:off x="11155680" y="6400800"/>
+            <a:ext cx="914400" cy="365760"/>
+          </a:xfrm>
+          <a:prstGeom prst="rect">
+            <a:avLst/>
+          </a:prstGeom>
+          <a:noFill/>
+        </p:spPr>
+        <p:txBody>
+          <a:bodyPr wrap="square">
+            <a:spAutoFit/>
+          </a:bodyPr>
+          <a:lstStyle/>
+          <a:p>
+            <a:pPr algn="r"/>
+            <a:r>
+              <a:rPr sz="1100" b="0">
+                <a:solidFill>
+                  <a:srgbClr val="6B7B8D"/>
+                </a:solidFill>
+                <a:latin typeface="Consolas"/>
+              </a:rPr>
+              <a:t>35 / 37</a:t>
+            </a:r>
+          </a:p>
+        </p:txBody>
+      </p:sp>
+    </p:spTree>
+  </p:cSld>
+  <p:clrMapOvr>
+    <a:masterClrMapping/>
+  </p:clrMapOvr>
+</p:sld>
+</file>
+
+<file path=ppt/slides/slide36.xml><?xml version="1.0" encoding="utf-8"?>
+<p:sld xmlns:a="http://schemas.openxmlformats.org/drawingml/2006/main" xmlns:p="http://schemas.openxmlformats.org/presentationml/2006/main" xmlns:r="http://schemas.openxmlformats.org/officeDocument/2006/relationships">
+  <p:cSld>
+    <p:bg>
+      <p:bgPr>
+        <a:solidFill>
+          <a:srgbClr val="F7F8FA"/>
+        </a:solidFill>
+        <a:effectLst/>
+      </p:bgPr>
+    </p:bg>
+    <p:spTree>
+      <p:nvGrpSpPr>
+        <p:cNvPr id="1" name=""/>
+        <p:cNvGrpSpPr/>
+        <p:nvPr/>
+      </p:nvGrpSpPr>
+      <p:grpSpPr/>
+      <p:sp>
+        <p:nvSpPr>
+          <p:cNvPr id="2" name="TextBox 1"/>
+          <p:cNvSpPr txBox="1"/>
+          <p:nvPr/>
+        </p:nvSpPr>
+        <p:spPr>
+          <a:xfrm>
+            <a:off x="731520" y="457200"/>
+            <a:ext cx="8412480" cy="731520"/>
+          </a:xfrm>
+          <a:prstGeom prst="rect">
+            <a:avLst/>
+          </a:prstGeom>
+          <a:noFill/>
+        </p:spPr>
+        <p:txBody>
+          <a:bodyPr wrap="square">
+            <a:spAutoFit/>
+          </a:bodyPr>
+          <a:lstStyle/>
+          <a:p>
+            <a:pPr algn="l">
+              <a:lnSpc>
+                <a:spcPts val="3800"/>
+              </a:lnSpc>
+            </a:pPr>
+            <a:r>
+              <a:rPr sz="3200" b="1">
+                <a:solidFill>
+                  <a:srgbClr val="1F2D3D"/>
+                </a:solidFill>
+                <a:latin typeface="Microsoft YaHei"/>
+              </a:rPr>
+              <a:t>Finding G: Fewer Experts, More Specialized</a:t>
+            </a:r>
+          </a:p>
+        </p:txBody>
+      </p:sp>
+      <p:sp>
+        <p:nvSpPr>
+          <p:cNvPr id="3" name="TextBox 2"/>
+          <p:cNvSpPr txBox="1"/>
+          <p:nvPr/>
+        </p:nvSpPr>
+        <p:spPr>
+          <a:xfrm>
+            <a:off x="7863840" y="603504"/>
+            <a:ext cx="3840480" cy="457200"/>
+          </a:xfrm>
+          <a:prstGeom prst="rect">
+            <a:avLst/>
+          </a:prstGeom>
+          <a:noFill/>
+        </p:spPr>
+        <p:txBody>
+          <a:bodyPr wrap="square">
+            <a:spAutoFit/>
+          </a:bodyPr>
+          <a:lstStyle/>
+          <a:p>
+            <a:pPr algn="r"/>
+            <a:r>
+              <a:rPr sz="1600" b="0">
+                <a:solidFill>
+                  <a:srgbClr val="1A4F8B"/>
+                </a:solidFill>
+                <a:latin typeface="Microsoft YaHei"/>
+              </a:rPr>
+              <a:t>Per-Expert Divergence</a:t>
+            </a:r>
+          </a:p>
+        </p:txBody>
+      </p:sp>
+      <p:pic>
+        <p:nvPicPr>
+          <p:cNvPr id="4" name="Picture 3" descr="moe_spread_compare.png"/>
+          <p:cNvPicPr>
+            <a:picLocks noChangeAspect="1"/>
+          </p:cNvPicPr>
+          <p:nvPr/>
+        </p:nvPicPr>
+        <p:blipFill>
+          <a:blip r:embed="rId2"/>
+          <a:stretch>
+            <a:fillRect/>
+          </a:stretch>
+        </p:blipFill>
+        <p:spPr>
+          <a:xfrm>
+            <a:off x="457200" y="1371600"/>
+            <a:ext cx="6126480" cy="4251960"/>
+          </a:xfrm>
+          <a:prstGeom prst="rect">
+            <a:avLst/>
+          </a:prstGeom>
+        </p:spPr>
+      </p:pic>
+      <p:sp>
+        <p:nvSpPr>
+          <p:cNvPr id="5" name="Rounded Rectangle 4"/>
+          <p:cNvSpPr/>
+          <p:nvPr/>
+        </p:nvSpPr>
+        <p:spPr>
+          <a:xfrm>
+            <a:off x="6858000" y="1508760"/>
+            <a:ext cx="4572000" cy="731520"/>
+          </a:xfrm>
+          <a:prstGeom prst="roundRect">
+            <a:avLst>
+              <a:gd name="adj" fmla="val 8000"/>
+            </a:avLst>
+          </a:prstGeom>
+          <a:solidFill>
+            <a:srgbClr val="F2F4F7"/>
+          </a:solidFill>
+          <a:ln>
+            <a:noFill/>
+          </a:ln>
+          <a:effectLst/>
+        </p:spPr>
+        <p:style>
+          <a:lnRef idx="1">
+            <a:schemeClr val="accent1"/>
+          </a:lnRef>
+          <a:fillRef idx="3">
+            <a:schemeClr val="accent1"/>
+          </a:fillRef>
+          <a:effectRef idx="2">
+            <a:schemeClr val="accent1"/>
+          </a:effectRef>
+          <a:fontRef idx="minor">
+            <a:schemeClr val="lt1"/>
+          </a:fontRef>
+        </p:style>
+        <p:txBody>
+          <a:bodyPr rtlCol="0" anchor="ctr"/>
+          <a:lstStyle/>
+          <a:p>
+            <a:pPr algn="ctr"/>
+          </a:p>
+        </p:txBody>
+      </p:sp>
+      <p:sp>
+        <p:nvSpPr>
+          <p:cNvPr id="6" name="TextBox 5"/>
+          <p:cNvSpPr txBox="1"/>
+          <p:nvPr/>
+        </p:nvSpPr>
+        <p:spPr>
+          <a:xfrm>
+            <a:off x="6858000" y="1627632"/>
+            <a:ext cx="4572000" cy="457200"/>
+          </a:xfrm>
+          <a:prstGeom prst="rect">
+            <a:avLst/>
+          </a:prstGeom>
+          <a:noFill/>
+        </p:spPr>
+        <p:txBody>
+          <a:bodyPr wrap="square">
+            <a:spAutoFit/>
+          </a:bodyPr>
+          <a:lstStyle/>
+          <a:p>
+            <a:pPr algn="ctr"/>
+            <a:r>
+              <a:rPr sz="1500" b="1">
+                <a:solidFill>
+                  <a:srgbClr val="1F2D3D"/>
+                </a:solidFill>
+                <a:latin typeface="Consolas"/>
+              </a:rPr>
+              <a:t>OLMoE σ(α)=0.02   vs   Mixtral σ(α)=0.85</a:t>
+            </a:r>
+          </a:p>
+        </p:txBody>
+      </p:sp>
+      <p:sp>
+        <p:nvSpPr>
+          <p:cNvPr id="7" name="TextBox 6"/>
+          <p:cNvSpPr txBox="1"/>
+          <p:nvPr/>
+        </p:nvSpPr>
+        <p:spPr>
+          <a:xfrm>
+            <a:off x="6858000" y="2514600"/>
+            <a:ext cx="4663440" cy="2194560"/>
+          </a:xfrm>
+          <a:prstGeom prst="rect">
+            <a:avLst/>
+          </a:prstGeom>
+          <a:noFill/>
+        </p:spPr>
+        <p:txBody>
+          <a:bodyPr wrap="square">
+            <a:spAutoFit/>
+          </a:bodyPr>
+          <a:lstStyle/>
+          <a:p>
+            <a:pPr algn="l" marL="285750" indent="-285750">
+              <a:lnSpc>
+                <a:spcPts val="2100"/>
+              </a:lnSpc>
+              <a:buFont typeface="Arial"/>
+              <a:buChar char="•"/>
+            </a:pPr>
+            <a:r>
+              <a:rPr sz="1300" b="0">
+                <a:solidFill>
+                  <a:srgbClr val="4A5A6B"/>
+                </a:solidFill>
+                <a:latin typeface="Microsoft YaHei"/>
+              </a:rPr>
+              <a:t>OLMoE (64 experts): experts </a:t>
+            </a:r>
+            <a:r>
+              <a:rPr sz="1300" b="1">
+                <a:solidFill>
+                  <a:srgbClr val="1A4F8B"/>
+                </a:solidFill>
+                <a:latin typeface="Microsoft YaHei"/>
+              </a:rPr>
+              <a:t>near-identical</a:t>
+            </a:r>
+          </a:p>
+          <a:p>
+            <a:pPr algn="l" marL="285750" indent="-285750">
+              <a:lnSpc>
+                <a:spcPts val="2100"/>
+              </a:lnSpc>
+              <a:buFont typeface="Arial"/>
+              <a:buChar char="•"/>
+            </a:pPr>
+            <a:r>
+              <a:rPr sz="1300" b="0">
+                <a:solidFill>
+                  <a:srgbClr val="4A5A6B"/>
+                </a:solidFill>
+                <a:latin typeface="Microsoft YaHei"/>
+              </a:rPr>
+              <a:t>spectra — fine-grained MoE homogenizes</a:t>
+            </a:r>
+          </a:p>
+          <a:p>
+            <a:pPr algn="l" marL="285750" indent="-285750">
+              <a:lnSpc>
+                <a:spcPts val="2100"/>
+              </a:lnSpc>
+              <a:buFont typeface="Arial"/>
+              <a:buChar char="•"/>
+            </a:pPr>
+            <a:r>
+              <a:rPr sz="1300" b="0">
+                <a:solidFill>
+                  <a:srgbClr val="4A5A6B"/>
+                </a:solidFill>
+                <a:latin typeface="Microsoft YaHei"/>
+              </a:rPr>
+              <a:t>Mixtral (8 experts): α spans 2.5–6.5 —</a:t>
+            </a:r>
+          </a:p>
+          <a:p>
+            <a:pPr algn="l" marL="285750" indent="-285750">
+              <a:lnSpc>
+                <a:spcPts val="2100"/>
+              </a:lnSpc>
+              <a:buFont typeface="Arial"/>
+              <a:buChar char="•"/>
+            </a:pPr>
+            <a:r>
+              <a:rPr sz="1300" b="0">
+                <a:solidFill>
+                  <a:srgbClr val="4A5A6B"/>
+                </a:solidFill>
+                <a:latin typeface="Microsoft YaHei"/>
+              </a:rPr>
+              <a:t>coarse MoE drives strong specialization</a:t>
+            </a:r>
+          </a:p>
+          <a:p>
+            <a:pPr algn="l" marL="285750" indent="-285750">
+              <a:lnSpc>
+                <a:spcPts val="2100"/>
+              </a:lnSpc>
+              <a:buFont typeface="Arial"/>
+              <a:buChar char="•"/>
+            </a:pPr>
+            <a:r>
+              <a:rPr sz="1300" b="0">
+                <a:solidFill>
+                  <a:srgbClr val="4A5A6B"/>
+                </a:solidFill>
+                <a:latin typeface="Microsoft YaHei"/>
+              </a:rPr>
+              <a:t>Mixtral FFN α rises with depth (→6), like dense</a:t>
+            </a:r>
+          </a:p>
+        </p:txBody>
+      </p:sp>
+      <p:sp>
+        <p:nvSpPr>
+          <p:cNvPr id="8" name="Rounded Rectangle 7"/>
+          <p:cNvSpPr/>
+          <p:nvPr/>
+        </p:nvSpPr>
+        <p:spPr>
+          <a:xfrm>
+            <a:off x="6858000" y="4709160"/>
+            <a:ext cx="4617720" cy="914400"/>
+          </a:xfrm>
+          <a:prstGeom prst="roundRect">
+            <a:avLst>
+              <a:gd name="adj" fmla="val 8000"/>
+            </a:avLst>
+          </a:prstGeom>
+          <a:solidFill>
+            <a:srgbClr val="E6F0EB"/>
+          </a:solidFill>
+          <a:ln>
+            <a:noFill/>
+          </a:ln>
+          <a:effectLst/>
+        </p:spPr>
+        <p:style>
+          <a:lnRef idx="1">
+            <a:schemeClr val="accent1"/>
+          </a:lnRef>
+          <a:fillRef idx="3">
+            <a:schemeClr val="accent1"/>
+          </a:fillRef>
+          <a:effectRef idx="2">
+            <a:schemeClr val="accent1"/>
+          </a:effectRef>
+          <a:fontRef idx="minor">
+            <a:schemeClr val="lt1"/>
+          </a:fontRef>
+        </p:style>
+        <p:txBody>
+          <a:bodyPr rtlCol="0" anchor="ctr"/>
+          <a:lstStyle/>
+          <a:p>
+            <a:pPr algn="ctr"/>
+          </a:p>
+        </p:txBody>
+      </p:sp>
+      <p:sp>
+        <p:nvSpPr>
+          <p:cNvPr id="9" name="TextBox 8"/>
+          <p:cNvSpPr txBox="1"/>
+          <p:nvPr/>
+        </p:nvSpPr>
+        <p:spPr>
+          <a:xfrm>
+            <a:off x="6995160" y="4846320"/>
+            <a:ext cx="4343400" cy="685800"/>
+          </a:xfrm>
+          <a:prstGeom prst="rect">
+            <a:avLst/>
+          </a:prstGeom>
+          <a:noFill/>
+        </p:spPr>
+        <p:txBody>
+          <a:bodyPr wrap="square" anchor="ctr">
+            <a:spAutoFit/>
+          </a:bodyPr>
+          <a:lstStyle/>
+          <a:p>
+            <a:pPr algn="l">
+              <a:lnSpc>
+                <a:spcPts val="1800"/>
+              </a:lnSpc>
+            </a:pPr>
+            <a:r>
+              <a:rPr sz="1300" b="0">
+                <a:solidFill>
+                  <a:srgbClr val="1F2D3D"/>
+                </a:solidFill>
+                <a:latin typeface="Microsoft YaHei"/>
+              </a:rPr>
+              <a:t>Expert granularity is a </a:t>
+            </a:r>
+            <a:r>
+              <a:rPr sz="1300" b="1">
+                <a:solidFill>
+                  <a:srgbClr val="2D6A4F"/>
+                </a:solidFill>
+                <a:latin typeface="Microsoft YaHei"/>
+              </a:rPr>
+              <a:t>specialization knob</a:t>
+            </a:r>
+            <a:r>
+              <a:rPr sz="1300" b="0">
+                <a:solidFill>
+                  <a:srgbClr val="1F2D3D"/>
+                </a:solidFill>
+                <a:latin typeface="Microsoft YaHei"/>
+              </a:rPr>
+              <a:t>:</a:t>
+            </a:r>
+          </a:p>
+          <a:p>
+            <a:pPr algn="l">
+              <a:lnSpc>
+                <a:spcPts val="1800"/>
+              </a:lnSpc>
+            </a:pPr>
+            <a:r>
+              <a:rPr sz="1300" b="0">
+                <a:solidFill>
+                  <a:srgbClr val="1F2D3D"/>
+                </a:solidFill>
+                <a:latin typeface="Microsoft YaHei"/>
+              </a:rPr>
+              <a:t>few wide experts diverge, many narrow ones converge.</a:t>
+            </a:r>
+          </a:p>
+        </p:txBody>
+      </p:sp>
+      <p:sp>
+        <p:nvSpPr>
+          <p:cNvPr id="10" name="TextBox 9"/>
+          <p:cNvSpPr txBox="1"/>
+          <p:nvPr/>
+        </p:nvSpPr>
+        <p:spPr>
+          <a:xfrm>
+            <a:off x="11155680" y="6400800"/>
+            <a:ext cx="914400" cy="365760"/>
+          </a:xfrm>
+          <a:prstGeom prst="rect">
+            <a:avLst/>
+          </a:prstGeom>
+          <a:noFill/>
+        </p:spPr>
+        <p:txBody>
+          <a:bodyPr wrap="square">
+            <a:spAutoFit/>
+          </a:bodyPr>
+          <a:lstStyle/>
+          <a:p>
+            <a:pPr algn="r"/>
+            <a:r>
+              <a:rPr sz="1100" b="0">
+                <a:solidFill>
+                  <a:srgbClr val="6B7B8D"/>
+                </a:solidFill>
+                <a:latin typeface="Consolas"/>
+              </a:rPr>
+              <a:t>36 / 37</a:t>
+            </a:r>
+          </a:p>
+        </p:txBody>
+      </p:sp>
+    </p:spTree>
+  </p:cSld>
+  <p:clrMapOvr>
+    <a:masterClrMapping/>
+  </p:clrMapOvr>
+</p:sld>
+</file>
+
+<file path=ppt/slides/slide37.xml><?xml version="1.0" encoding="utf-8"?>
+<p:sld xmlns:a="http://schemas.openxmlformats.org/drawingml/2006/main" xmlns:p="http://schemas.openxmlformats.org/presentationml/2006/main" xmlns:r="http://schemas.openxmlformats.org/officeDocument/2006/relationships">
+  <p:cSld>
+    <p:bg>
+      <p:bgPr>
+        <a:solidFill>
+          <a:srgbClr val="F7F8FA"/>
+        </a:solidFill>
+        <a:effectLst/>
+      </p:bgPr>
+    </p:bg>
+    <p:spTree>
+      <p:nvGrpSpPr>
+        <p:cNvPr id="1" name=""/>
+        <p:cNvGrpSpPr/>
+        <p:nvPr/>
+      </p:nvGrpSpPr>
+      <p:grpSpPr/>
+      <p:sp>
+        <p:nvSpPr>
+          <p:cNvPr id="2" name="TextBox 1"/>
+          <p:cNvSpPr txBox="1"/>
+          <p:nvPr/>
+        </p:nvSpPr>
+        <p:spPr>
+          <a:xfrm>
+            <a:off x="731520" y="457200"/>
+            <a:ext cx="8412480" cy="731520"/>
+          </a:xfrm>
+          <a:prstGeom prst="rect">
+            <a:avLst/>
+          </a:prstGeom>
+          <a:noFill/>
+        </p:spPr>
+        <p:txBody>
+          <a:bodyPr wrap="square">
+            <a:spAutoFit/>
+          </a:bodyPr>
+          <a:lstStyle/>
+          <a:p>
+            <a:pPr algn="l">
+              <a:lnSpc>
+                <a:spcPts val="3800"/>
+              </a:lnSpc>
+            </a:pPr>
+            <a:r>
+              <a:rPr sz="3200" b="1">
+                <a:solidFill>
+                  <a:srgbClr val="1F2D3D"/>
+                </a:solidFill>
+                <a:latin typeface="Microsoft YaHei"/>
+              </a:rPr>
+              <a:t>Finding H: Width Sets the α Regime — Universally</a:t>
+            </a:r>
+          </a:p>
+        </p:txBody>
+      </p:sp>
+      <p:sp>
+        <p:nvSpPr>
+          <p:cNvPr id="3" name="TextBox 2"/>
+          <p:cNvSpPr txBox="1"/>
+          <p:nvPr/>
+        </p:nvSpPr>
+        <p:spPr>
+          <a:xfrm>
+            <a:off x="7863840" y="603504"/>
+            <a:ext cx="3840480" cy="457200"/>
+          </a:xfrm>
+          <a:prstGeom prst="rect">
+            <a:avLst/>
+          </a:prstGeom>
+          <a:noFill/>
+        </p:spPr>
+        <p:txBody>
+          <a:bodyPr wrap="square">
+            <a:spAutoFit/>
+          </a:bodyPr>
+          <a:lstStyle/>
+          <a:p>
+            <a:pPr algn="r"/>
+            <a:r>
+              <a:rPr sz="1600" b="0">
+                <a:solidFill>
+                  <a:srgbClr val="1A4F8B"/>
+                </a:solidFill>
+                <a:latin typeface="Microsoft YaHei"/>
+              </a:rPr>
+              <a:t>Dense + MoE Unified</a:t>
+            </a:r>
+          </a:p>
+        </p:txBody>
+      </p:sp>
+      <p:pic>
+        <p:nvPicPr>
+          <p:cNvPr id="4" name="Picture 3" descr="unified_alpha_vs_width.png"/>
+          <p:cNvPicPr>
+            <a:picLocks noChangeAspect="1"/>
+          </p:cNvPicPr>
+          <p:nvPr/>
+        </p:nvPicPr>
+        <p:blipFill>
+          <a:blip r:embed="rId2"/>
+          <a:stretch>
+            <a:fillRect/>
+          </a:stretch>
+        </p:blipFill>
+        <p:spPr>
+          <a:xfrm>
+            <a:off x="457200" y="1371600"/>
+            <a:ext cx="6126480" cy="4251960"/>
+          </a:xfrm>
+          <a:prstGeom prst="rect">
+            <a:avLst/>
+          </a:prstGeom>
+        </p:spPr>
+      </p:pic>
+      <p:sp>
+        <p:nvSpPr>
+          <p:cNvPr id="5" name="Rounded Rectangle 4"/>
+          <p:cNvSpPr/>
+          <p:nvPr/>
+        </p:nvSpPr>
+        <p:spPr>
+          <a:xfrm>
+            <a:off x="6858000" y="1508760"/>
+            <a:ext cx="4572000" cy="731520"/>
+          </a:xfrm>
+          <a:prstGeom prst="roundRect">
+            <a:avLst>
+              <a:gd name="adj" fmla="val 8000"/>
+            </a:avLst>
+          </a:prstGeom>
+          <a:solidFill>
+            <a:srgbClr val="F2F4F7"/>
+          </a:solidFill>
+          <a:ln>
+            <a:noFill/>
+          </a:ln>
+          <a:effectLst/>
+        </p:spPr>
+        <p:style>
+          <a:lnRef idx="1">
+            <a:schemeClr val="accent1"/>
+          </a:lnRef>
+          <a:fillRef idx="3">
+            <a:schemeClr val="accent1"/>
+          </a:fillRef>
+          <a:effectRef idx="2">
+            <a:schemeClr val="accent1"/>
+          </a:effectRef>
+          <a:fontRef idx="minor">
+            <a:schemeClr val="lt1"/>
+          </a:fontRef>
+        </p:style>
+        <p:txBody>
+          <a:bodyPr rtlCol="0" anchor="ctr"/>
+          <a:lstStyle/>
+          <a:p>
+            <a:pPr algn="ctr"/>
+          </a:p>
+        </p:txBody>
+      </p:sp>
+      <p:sp>
+        <p:nvSpPr>
+          <p:cNvPr id="6" name="TextBox 5"/>
+          <p:cNvSpPr txBox="1"/>
+          <p:nvPr/>
+        </p:nvSpPr>
+        <p:spPr>
+          <a:xfrm>
+            <a:off x="6858000" y="1627632"/>
+            <a:ext cx="4572000" cy="457200"/>
+          </a:xfrm>
+          <a:prstGeom prst="rect">
+            <a:avLst/>
+          </a:prstGeom>
+          <a:noFill/>
+        </p:spPr>
+        <p:txBody>
+          <a:bodyPr wrap="square">
+            <a:spAutoFit/>
+          </a:bodyPr>
+          <a:lstStyle/>
+          <a:p>
+            <a:pPr algn="ctr"/>
+            <a:r>
+              <a:rPr sz="1500" b="1">
+                <a:solidFill>
+                  <a:srgbClr val="1F2D3D"/>
+                </a:solidFill>
+                <a:latin typeface="Consolas"/>
+              </a:rPr>
+              <a:t>narrow matrix → Lévy (α&lt;2)   ·   wide matrix → α 4–5</a:t>
+            </a:r>
+          </a:p>
+        </p:txBody>
+      </p:sp>
+      <p:sp>
+        <p:nvSpPr>
+          <p:cNvPr id="7" name="TextBox 6"/>
+          <p:cNvSpPr txBox="1"/>
+          <p:nvPr/>
+        </p:nvSpPr>
+        <p:spPr>
+          <a:xfrm>
+            <a:off x="6858000" y="2514600"/>
+            <a:ext cx="4663440" cy="2194560"/>
+          </a:xfrm>
+          <a:prstGeom prst="rect">
+            <a:avLst/>
+          </a:prstGeom>
+          <a:noFill/>
+        </p:spPr>
+        <p:txBody>
+          <a:bodyPr wrap="square">
+            <a:spAutoFit/>
+          </a:bodyPr>
+          <a:lstStyle/>
+          <a:p>
+            <a:pPr algn="l" marL="285750" indent="-285750">
+              <a:lnSpc>
+                <a:spcPts val="2100"/>
+              </a:lnSpc>
+              <a:buFont typeface="Arial"/>
+              <a:buChar char="•"/>
+            </a:pPr>
+            <a:r>
+              <a:rPr sz="1300" b="0">
+                <a:solidFill>
+                  <a:srgbClr val="4A5A6B"/>
+                </a:solidFill>
+                <a:latin typeface="Microsoft YaHei"/>
+              </a:rPr>
+              <a:t>Same trend in </a:t>
+            </a:r>
+            <a:r>
+              <a:rPr sz="1300" b="1">
+                <a:solidFill>
+                  <a:srgbClr val="1F2D3D"/>
+                </a:solidFill>
+                <a:latin typeface="Microsoft YaHei"/>
+              </a:rPr>
+              <a:t>both families</a:t>
+            </a:r>
+            <a:r>
+              <a:rPr sz="1300" b="0">
+                <a:solidFill>
+                  <a:srgbClr val="4A5A6B"/>
+                </a:solidFill>
+                <a:latin typeface="Microsoft YaHei"/>
+              </a:rPr>
+              <a:t>: wider → higher α</a:t>
+            </a:r>
+          </a:p>
+          <a:p>
+            <a:pPr algn="l" marL="285750" indent="-285750">
+              <a:lnSpc>
+                <a:spcPts val="2100"/>
+              </a:lnSpc>
+              <a:buFont typeface="Arial"/>
+              <a:buChar char="•"/>
+            </a:pPr>
+            <a:r>
+              <a:rPr sz="1300" b="0">
+                <a:solidFill>
+                  <a:srgbClr val="4A5A6B"/>
+                </a:solidFill>
+                <a:latin typeface="Microsoft YaHei"/>
+              </a:rPr>
+              <a:t>Dense Pythia: hidden 512→4096 ⇒ attn α 1.6→5.2</a:t>
+            </a:r>
+          </a:p>
+          <a:p>
+            <a:pPr algn="l" marL="285750" indent="-285750">
+              <a:lnSpc>
+                <a:spcPts val="2100"/>
+              </a:lnSpc>
+              <a:buFont typeface="Arial"/>
+              <a:buChar char="•"/>
+            </a:pPr>
+            <a:r>
+              <a:rPr sz="1300" b="0">
+                <a:solidFill>
+                  <a:srgbClr val="4A5A6B"/>
+                </a:solidFill>
+                <a:latin typeface="Microsoft YaHei"/>
+              </a:rPr>
+              <a:t>MoE: expert int 1024→14336 ⇒ α 1.46→4.00</a:t>
+            </a:r>
+          </a:p>
+          <a:p>
+            <a:pPr algn="l" marL="285750" indent="-285750">
+              <a:lnSpc>
+                <a:spcPts val="2100"/>
+              </a:lnSpc>
+              <a:buFont typeface="Arial"/>
+              <a:buChar char="•"/>
+            </a:pPr>
+            <a:r>
+              <a:rPr sz="1300" b="0">
+                <a:solidFill>
+                  <a:srgbClr val="4A5A6B"/>
+                </a:solidFill>
+                <a:latin typeface="Microsoft YaHei"/>
+              </a:rPr>
+              <a:t>α&lt;2 is </a:t>
+            </a:r>
+            <a:r>
+              <a:rPr sz="1300" b="1">
+                <a:solidFill>
+                  <a:srgbClr val="2D6A4F"/>
+                </a:solidFill>
+                <a:latin typeface="Microsoft YaHei"/>
+              </a:rPr>
+              <a:t>not MoE-specific</a:t>
+            </a:r>
+            <a:r>
+              <a:rPr sz="1300" b="0">
+                <a:solidFill>
+                  <a:srgbClr val="4A5A6B"/>
+                </a:solidFill>
+                <a:latin typeface="Microsoft YaHei"/>
+              </a:rPr>
+              <a:t> — small dense</a:t>
+            </a:r>
+          </a:p>
+          <a:p>
+            <a:pPr algn="l" marL="285750" indent="-285750">
+              <a:lnSpc>
+                <a:spcPts val="2100"/>
+              </a:lnSpc>
+              <a:buFont typeface="Arial"/>
+              <a:buChar char="•"/>
+            </a:pPr>
+            <a:r>
+              <a:rPr sz="1300" b="0">
+                <a:solidFill>
+                  <a:srgbClr val="4A5A6B"/>
+                </a:solidFill>
+                <a:latin typeface="Microsoft YaHei"/>
+              </a:rPr>
+              <a:t>models’ attention is heavy-tailed too</a:t>
+            </a:r>
+          </a:p>
+        </p:txBody>
+      </p:sp>
+      <p:sp>
+        <p:nvSpPr>
+          <p:cNvPr id="8" name="Rounded Rectangle 7"/>
+          <p:cNvSpPr/>
+          <p:nvPr/>
+        </p:nvSpPr>
+        <p:spPr>
+          <a:xfrm>
+            <a:off x="6858000" y="4709160"/>
+            <a:ext cx="4617720" cy="914400"/>
+          </a:xfrm>
+          <a:prstGeom prst="roundRect">
+            <a:avLst>
+              <a:gd name="adj" fmla="val 8000"/>
+            </a:avLst>
+          </a:prstGeom>
+          <a:solidFill>
+            <a:srgbClr val="E6F0EB"/>
+          </a:solidFill>
+          <a:ln>
+            <a:noFill/>
+          </a:ln>
+          <a:effectLst/>
+        </p:spPr>
+        <p:style>
+          <a:lnRef idx="1">
+            <a:schemeClr val="accent1"/>
+          </a:lnRef>
+          <a:fillRef idx="3">
+            <a:schemeClr val="accent1"/>
+          </a:fillRef>
+          <a:effectRef idx="2">
+            <a:schemeClr val="accent1"/>
+          </a:effectRef>
+          <a:fontRef idx="minor">
+            <a:schemeClr val="lt1"/>
+          </a:fontRef>
+        </p:style>
+        <p:txBody>
+          <a:bodyPr rtlCol="0" anchor="ctr"/>
+          <a:lstStyle/>
+          <a:p>
+            <a:pPr algn="ctr"/>
+          </a:p>
+        </p:txBody>
+      </p:sp>
+      <p:sp>
+        <p:nvSpPr>
+          <p:cNvPr id="9" name="TextBox 8"/>
+          <p:cNvSpPr txBox="1"/>
+          <p:nvPr/>
+        </p:nvSpPr>
+        <p:spPr>
+          <a:xfrm>
+            <a:off x="6995160" y="4846320"/>
+            <a:ext cx="4343400" cy="685800"/>
+          </a:xfrm>
+          <a:prstGeom prst="rect">
+            <a:avLst/>
+          </a:prstGeom>
+          <a:noFill/>
+        </p:spPr>
+        <p:txBody>
+          <a:bodyPr wrap="square" anchor="ctr">
+            <a:spAutoFit/>
+          </a:bodyPr>
+          <a:lstStyle/>
+          <a:p>
+            <a:pPr algn="l">
+              <a:lnSpc>
+                <a:spcPts val="1800"/>
+              </a:lnSpc>
+            </a:pPr>
+            <a:r>
+              <a:rPr sz="1300" b="0">
+                <a:solidFill>
+                  <a:srgbClr val="1F2D3D"/>
+                </a:solidFill>
+                <a:latin typeface="Microsoft YaHei"/>
+              </a:rPr>
+              <a:t>The α regime is set by </a:t>
+            </a:r>
+            <a:r>
+              <a:rPr sz="1300" b="1">
+                <a:solidFill>
+                  <a:srgbClr val="2D6A4F"/>
+                </a:solidFill>
+                <a:latin typeface="Microsoft YaHei"/>
+              </a:rPr>
+              <a:t>per-matrix width</a:t>
+            </a:r>
+            <a:r>
+              <a:rPr sz="1300" b="0">
+                <a:solidFill>
+                  <a:srgbClr val="1F2D3D"/>
+                </a:solidFill>
+                <a:latin typeface="Microsoft YaHei"/>
+              </a:rPr>
+              <a:t>,</a:t>
+            </a:r>
+          </a:p>
+          <a:p>
+            <a:pPr algn="l">
+              <a:lnSpc>
+                <a:spcPts val="1800"/>
+              </a:lnSpc>
+            </a:pPr>
+            <a:r>
+              <a:rPr sz="1300" b="0">
+                <a:solidFill>
+                  <a:srgbClr val="1F2D3D"/>
+                </a:solidFill>
+                <a:latin typeface="Microsoft YaHei"/>
+              </a:rPr>
+              <a:t>not by MoE vs dense — a single unifying knob.</a:t>
+            </a:r>
+          </a:p>
+        </p:txBody>
+      </p:sp>
+      <p:sp>
+        <p:nvSpPr>
+          <p:cNvPr id="10" name="TextBox 9"/>
+          <p:cNvSpPr txBox="1"/>
+          <p:nvPr/>
+        </p:nvSpPr>
+        <p:spPr>
+          <a:xfrm>
+            <a:off x="11155680" y="6400800"/>
+            <a:ext cx="914400" cy="365760"/>
+          </a:xfrm>
+          <a:prstGeom prst="rect">
+            <a:avLst/>
+          </a:prstGeom>
+          <a:noFill/>
+        </p:spPr>
+        <p:txBody>
+          <a:bodyPr wrap="square">
+            <a:spAutoFit/>
+          </a:bodyPr>
+          <a:lstStyle/>
+          <a:p>
+            <a:pPr algn="r"/>
+            <a:r>
+              <a:rPr sz="1100" b="0">
+                <a:solidFill>
+                  <a:srgbClr val="6B7B8D"/>
+                </a:solidFill>
+                <a:latin typeface="Consolas"/>
+              </a:rPr>
+              <a:t>37 / 37</a:t>
             </a:r>
           </a:p>
         </p:txBody>
@@ -21292,7 +22774,7 @@
               </a:defRPr>
             </a:pPr>
             <a:r>
-              <a:t>04 / 34</a:t>
+              <a:t>04 / 37</a:t>
             </a:r>
           </a:p>
         </p:txBody>
@@ -22099,7 +23581,7 @@
               </a:defRPr>
             </a:pPr>
             <a:r>
-              <a:t>05 / 34</a:t>
+              <a:t>05 / 37</a:t>
             </a:r>
           </a:p>
         </p:txBody>
@@ -22982,7 +24464,7 @@
               </a:defRPr>
             </a:pPr>
             <a:r>
-              <a:t>06 / 34</a:t>
+              <a:t>06 / 37</a:t>
             </a:r>
           </a:p>
         </p:txBody>
@@ -23450,7 +24932,7 @@
               </a:defRPr>
             </a:pPr>
             <a:r>
-              <a:t>07 / 34</a:t>
+              <a:t>07 / 37</a:t>
             </a:r>
           </a:p>
         </p:txBody>
@@ -23639,7 +25121,7 @@
               </a:defRPr>
             </a:pPr>
             <a:r>
-              <a:t>08 / 34</a:t>
+              <a:t>08 / 37</a:t>
             </a:r>
           </a:p>
         </p:txBody>
@@ -24102,7 +25584,7 @@
               </a:defRPr>
             </a:pPr>
             <a:r>
-              <a:t>09 / 34</a:t>
+              <a:t>09 / 37</a:t>
             </a:r>
           </a:p>
         </p:txBody>
